--- a/desrosiers Lucas /Projet MELAINA (abeille) 2/les fichier du mindview/mindview lucas /Etudiant 2 lucas .pptx
+++ b/desrosiers Lucas /Projet MELAINA (abeille) 2/les fichier du mindview/mindview lucas /Etudiant 2 lucas .pptx
@@ -5,9 +5,7 @@
     <p:sldMasterId id="2147483648" r:id="rId1"/>
   </p:sldMasterIdLst>
   <p:sldIdLst>
-    <p:sldId id="256" r:id="rId2"/>
-    <p:sldId id="257" r:id="rId3"/>
-    <p:sldId id="258" r:id="rId4"/>
+    <p:sldId id="257" r:id="rId2"/>
   </p:sldIdLst>
   <p:sldSz cx="12192000" cy="6858000"/>
   <p:notesSz cx="6858000" cy="9144000"/>
@@ -106,6 +104,11 @@
       </a:defRPr>
     </a:lvl9pPr>
   </p:defaultTextStyle>
+  <p:extLst>
+    <p:ext uri="{EFAFB233-063F-42B5-8137-9DF3F51BA10A}">
+      <p15:sldGuideLst xmlns:p15="http://schemas.microsoft.com/office/powerpoint/2012/main"/>
+    </p:ext>
+  </p:extLst>
 </p:presentation>
 </file>
 
@@ -256,7 +259,7 @@
           <a:p>
             <a:fld id="{ABAC5358-DCFB-654B-B018-27D69D127FCB}" type="datetimeFigureOut">
               <a:rPr lang="fr-FR" smtClean="0"/>
-              <a:t>06/01/2026</a:t>
+              <a:t>01/06/2026</a:t>
             </a:fld>
             <a:endParaRPr lang="fr-FR"/>
           </a:p>
@@ -454,7 +457,7 @@
           <a:p>
             <a:fld id="{ABAC5358-DCFB-654B-B018-27D69D127FCB}" type="datetimeFigureOut">
               <a:rPr lang="fr-FR" smtClean="0"/>
-              <a:t>06/01/2026</a:t>
+              <a:t>01/06/2026</a:t>
             </a:fld>
             <a:endParaRPr lang="fr-FR"/>
           </a:p>
@@ -662,7 +665,7 @@
           <a:p>
             <a:fld id="{ABAC5358-DCFB-654B-B018-27D69D127FCB}" type="datetimeFigureOut">
               <a:rPr lang="fr-FR" smtClean="0"/>
-              <a:t>06/01/2026</a:t>
+              <a:t>01/06/2026</a:t>
             </a:fld>
             <a:endParaRPr lang="fr-FR"/>
           </a:p>
@@ -860,7 +863,7 @@
           <a:p>
             <a:fld id="{ABAC5358-DCFB-654B-B018-27D69D127FCB}" type="datetimeFigureOut">
               <a:rPr lang="fr-FR" smtClean="0"/>
-              <a:t>06/01/2026</a:t>
+              <a:t>01/06/2026</a:t>
             </a:fld>
             <a:endParaRPr lang="fr-FR"/>
           </a:p>
@@ -1135,7 +1138,7 @@
           <a:p>
             <a:fld id="{ABAC5358-DCFB-654B-B018-27D69D127FCB}" type="datetimeFigureOut">
               <a:rPr lang="fr-FR" smtClean="0"/>
-              <a:t>06/01/2026</a:t>
+              <a:t>01/06/2026</a:t>
             </a:fld>
             <a:endParaRPr lang="fr-FR"/>
           </a:p>
@@ -1400,7 +1403,7 @@
           <a:p>
             <a:fld id="{ABAC5358-DCFB-654B-B018-27D69D127FCB}" type="datetimeFigureOut">
               <a:rPr lang="fr-FR" smtClean="0"/>
-              <a:t>06/01/2026</a:t>
+              <a:t>01/06/2026</a:t>
             </a:fld>
             <a:endParaRPr lang="fr-FR"/>
           </a:p>
@@ -1812,7 +1815,7 @@
           <a:p>
             <a:fld id="{ABAC5358-DCFB-654B-B018-27D69D127FCB}" type="datetimeFigureOut">
               <a:rPr lang="fr-FR" smtClean="0"/>
-              <a:t>06/01/2026</a:t>
+              <a:t>01/06/2026</a:t>
             </a:fld>
             <a:endParaRPr lang="fr-FR"/>
           </a:p>
@@ -1953,7 +1956,7 @@
           <a:p>
             <a:fld id="{ABAC5358-DCFB-654B-B018-27D69D127FCB}" type="datetimeFigureOut">
               <a:rPr lang="fr-FR" smtClean="0"/>
-              <a:t>06/01/2026</a:t>
+              <a:t>01/06/2026</a:t>
             </a:fld>
             <a:endParaRPr lang="fr-FR"/>
           </a:p>
@@ -2066,7 +2069,7 @@
           <a:p>
             <a:fld id="{ABAC5358-DCFB-654B-B018-27D69D127FCB}" type="datetimeFigureOut">
               <a:rPr lang="fr-FR" smtClean="0"/>
-              <a:t>06/01/2026</a:t>
+              <a:t>01/06/2026</a:t>
             </a:fld>
             <a:endParaRPr lang="fr-FR"/>
           </a:p>
@@ -2377,7 +2380,7 @@
           <a:p>
             <a:fld id="{ABAC5358-DCFB-654B-B018-27D69D127FCB}" type="datetimeFigureOut">
               <a:rPr lang="fr-FR" smtClean="0"/>
-              <a:t>06/01/2026</a:t>
+              <a:t>01/06/2026</a:t>
             </a:fld>
             <a:endParaRPr lang="fr-FR"/>
           </a:p>
@@ -2665,7 +2668,7 @@
           <a:p>
             <a:fld id="{ABAC5358-DCFB-654B-B018-27D69D127FCB}" type="datetimeFigureOut">
               <a:rPr lang="fr-FR" smtClean="0"/>
-              <a:t>06/01/2026</a:t>
+              <a:t>01/06/2026</a:t>
             </a:fld>
             <a:endParaRPr lang="fr-FR"/>
           </a:p>
@@ -2906,7 +2909,7 @@
           <a:p>
             <a:fld id="{ABAC5358-DCFB-654B-B018-27D69D127FCB}" type="datetimeFigureOut">
               <a:rPr lang="fr-FR" smtClean="0"/>
-              <a:t>06/01/2026</a:t>
+              <a:t>01/06/2026</a:t>
             </a:fld>
             <a:endParaRPr lang="fr-FR"/>
           </a:p>
@@ -3336,297 +3339,6 @@
           <p:cNvPr id="11" name="Rectangle 10">
             <a:extLst>
               <a:ext uri="{FF2B5EF4-FFF2-40B4-BE49-F238E27FC236}">
-                <a16:creationId xmlns:a16="http://schemas.microsoft.com/office/drawing/2014/main" id="{6F828D28-8E09-41CC-8229-3070B5467A96}"/>
-              </a:ext>
-              <a:ext uri="{C183D7F6-B498-43B3-948B-1728B52AA6E4}">
-                <adec:decorative xmlns:adec="http://schemas.microsoft.com/office/drawing/2017/decorative" val="1"/>
-              </a:ext>
-            </a:extLst>
-          </p:cNvPr>
-          <p:cNvSpPr>
-            <a:spLocks noGrp="1" noRot="1" noChangeAspect="1" noMove="1" noResize="1" noEditPoints="1" noAdjustHandles="1" noChangeArrowheads="1" noChangeShapeType="1" noTextEdit="1"/>
-          </p:cNvSpPr>
-          <p:nvPr>
-            <p:extLst>
-              <p:ext uri="{386F3935-93C4-4BCD-93E2-E3B085C9AB24}">
-                <p16:designElem xmlns:p16="http://schemas.microsoft.com/office/powerpoint/2015/main" val="1"/>
-              </p:ext>
-            </p:extLst>
-          </p:nvPr>
-        </p:nvSpPr>
-        <p:spPr>
-          <a:xfrm>
-            <a:off x="-1" y="0"/>
-            <a:ext cx="12188952" cy="6858000"/>
-          </a:xfrm>
-          <a:prstGeom prst="rect">
-            <a:avLst/>
-          </a:prstGeom>
-          <a:ln>
-            <a:noFill/>
-          </a:ln>
-        </p:spPr>
-        <p:style>
-          <a:lnRef idx="2">
-            <a:schemeClr val="accent1">
-              <a:shade val="50000"/>
-            </a:schemeClr>
-          </a:lnRef>
-          <a:fillRef idx="1">
-            <a:schemeClr val="accent1"/>
-          </a:fillRef>
-          <a:effectRef idx="0">
-            <a:schemeClr val="accent1"/>
-          </a:effectRef>
-          <a:fontRef idx="minor">
-            <a:schemeClr val="lt1"/>
-          </a:fontRef>
-        </p:style>
-        <p:txBody>
-          <a:bodyPr rtlCol="0" anchor="ctr"/>
-          <a:lstStyle/>
-          <a:p>
-            <a:pPr algn="ctr"/>
-            <a:endParaRPr lang="en-US"/>
-          </a:p>
-        </p:txBody>
-      </p:sp>
-      <p:pic>
-        <p:nvPicPr>
-          <p:cNvPr id="6" name="Image 5">
-            <a:extLst>
-              <a:ext uri="{FF2B5EF4-FFF2-40B4-BE49-F238E27FC236}">
-                <a16:creationId xmlns:a16="http://schemas.microsoft.com/office/drawing/2014/main" id="{1D11A595-F853-BEAB-F08D-91EDDC5E1173}"/>
-              </a:ext>
-            </a:extLst>
-          </p:cNvPr>
-          <p:cNvPicPr>
-            <a:picLocks noChangeAspect="1"/>
-          </p:cNvPicPr>
-          <p:nvPr/>
-        </p:nvPicPr>
-        <p:blipFill>
-          <a:blip r:embed="rId2"/>
-          <a:srcRect l="3112" r="1" b="1"/>
-          <a:stretch>
-            <a:fillRect/>
-          </a:stretch>
-        </p:blipFill>
-        <p:spPr>
-          <a:xfrm>
-            <a:off x="20" y="-22"/>
-            <a:ext cx="12191977" cy="6858022"/>
-          </a:xfrm>
-          <a:prstGeom prst="rect">
-            <a:avLst/>
-          </a:prstGeom>
-        </p:spPr>
-      </p:pic>
-      <p:sp>
-        <p:nvSpPr>
-          <p:cNvPr id="13" name="Rectangle 12">
-            <a:extLst>
-              <a:ext uri="{FF2B5EF4-FFF2-40B4-BE49-F238E27FC236}">
-                <a16:creationId xmlns:a16="http://schemas.microsoft.com/office/drawing/2014/main" id="{D5B012D8-7F27-4758-9AC6-C889B154BD73}"/>
-              </a:ext>
-              <a:ext uri="{C183D7F6-B498-43B3-948B-1728B52AA6E4}">
-                <adec:decorative xmlns:adec="http://schemas.microsoft.com/office/drawing/2017/decorative" val="1"/>
-              </a:ext>
-            </a:extLst>
-          </p:cNvPr>
-          <p:cNvSpPr>
-            <a:spLocks noGrp="1" noRot="1" noChangeAspect="1" noMove="1" noResize="1" noEditPoints="1" noAdjustHandles="1" noChangeArrowheads="1" noChangeShapeType="1" noTextEdit="1"/>
-          </p:cNvSpPr>
-          <p:nvPr>
-            <p:extLst>
-              <p:ext uri="{386F3935-93C4-4BCD-93E2-E3B085C9AB24}">
-                <p16:designElem xmlns:p16="http://schemas.microsoft.com/office/powerpoint/2015/main" val="1"/>
-              </p:ext>
-            </p:extLst>
-          </p:nvPr>
-        </p:nvSpPr>
-        <p:spPr>
-          <a:xfrm rot="16200000">
-            <a:off x="-1103377" y="1100316"/>
-            <a:ext cx="6858003" cy="4657347"/>
-          </a:xfrm>
-          <a:prstGeom prst="rect">
-            <a:avLst/>
-          </a:prstGeom>
-          <a:gradFill flip="none" rotWithShape="1">
-            <a:gsLst>
-              <a:gs pos="48000">
-                <a:srgbClr val="000000">
-                  <a:alpha val="24000"/>
-                </a:srgbClr>
-              </a:gs>
-              <a:gs pos="85000">
-                <a:srgbClr val="000000">
-                  <a:alpha val="45000"/>
-                </a:srgbClr>
-              </a:gs>
-              <a:gs pos="0">
-                <a:srgbClr val="000000">
-                  <a:alpha val="0"/>
-                </a:srgbClr>
-              </a:gs>
-            </a:gsLst>
-            <a:lin ang="16200000" scaled="1"/>
-            <a:tileRect/>
-          </a:gradFill>
-          <a:ln>
-            <a:noFill/>
-          </a:ln>
-        </p:spPr>
-        <p:style>
-          <a:lnRef idx="2">
-            <a:schemeClr val="accent1">
-              <a:shade val="50000"/>
-            </a:schemeClr>
-          </a:lnRef>
-          <a:fillRef idx="1">
-            <a:schemeClr val="accent1"/>
-          </a:fillRef>
-          <a:effectRef idx="0">
-            <a:schemeClr val="accent1"/>
-          </a:effectRef>
-          <a:fontRef idx="minor">
-            <a:schemeClr val="lt1"/>
-          </a:fontRef>
-        </p:style>
-        <p:txBody>
-          <a:bodyPr rtlCol="0" anchor="ctr"/>
-          <a:lstStyle/>
-          <a:p>
-            <a:pPr algn="ctr"/>
-            <a:endParaRPr lang="en-US"/>
-          </a:p>
-        </p:txBody>
-      </p:sp>
-      <p:sp>
-        <p:nvSpPr>
-          <p:cNvPr id="15" name="Rectangle 14">
-            <a:extLst>
-              <a:ext uri="{FF2B5EF4-FFF2-40B4-BE49-F238E27FC236}">
-                <a16:creationId xmlns:a16="http://schemas.microsoft.com/office/drawing/2014/main" id="{4063B759-00FC-46D1-9898-8E8625268FAF}"/>
-              </a:ext>
-              <a:ext uri="{C183D7F6-B498-43B3-948B-1728B52AA6E4}">
-                <adec:decorative xmlns:adec="http://schemas.microsoft.com/office/drawing/2017/decorative" val="1"/>
-              </a:ext>
-            </a:extLst>
-          </p:cNvPr>
-          <p:cNvSpPr>
-            <a:spLocks noGrp="1" noRot="1" noChangeAspect="1" noMove="1" noResize="1" noEditPoints="1" noAdjustHandles="1" noChangeArrowheads="1" noChangeShapeType="1" noTextEdit="1"/>
-          </p:cNvSpPr>
-          <p:nvPr>
-            <p:extLst>
-              <p:ext uri="{386F3935-93C4-4BCD-93E2-E3B085C9AB24}">
-                <p16:designElem xmlns:p16="http://schemas.microsoft.com/office/powerpoint/2015/main" val="1"/>
-              </p:ext>
-            </p:extLst>
-          </p:nvPr>
-        </p:nvSpPr>
-        <p:spPr>
-          <a:xfrm rot="5400000">
-            <a:off x="7540187" y="2206184"/>
-            <a:ext cx="6858003" cy="2445624"/>
-          </a:xfrm>
-          <a:prstGeom prst="rect">
-            <a:avLst/>
-          </a:prstGeom>
-          <a:gradFill flip="none" rotWithShape="1">
-            <a:gsLst>
-              <a:gs pos="48000">
-                <a:srgbClr val="000000">
-                  <a:alpha val="24000"/>
-                </a:srgbClr>
-              </a:gs>
-              <a:gs pos="85000">
-                <a:srgbClr val="000000">
-                  <a:alpha val="45000"/>
-                </a:srgbClr>
-              </a:gs>
-              <a:gs pos="0">
-                <a:srgbClr val="000000">
-                  <a:alpha val="0"/>
-                </a:srgbClr>
-              </a:gs>
-            </a:gsLst>
-            <a:lin ang="16200000" scaled="1"/>
-            <a:tileRect/>
-          </a:gradFill>
-          <a:ln>
-            <a:noFill/>
-          </a:ln>
-        </p:spPr>
-        <p:style>
-          <a:lnRef idx="2">
-            <a:schemeClr val="accent1">
-              <a:shade val="50000"/>
-            </a:schemeClr>
-          </a:lnRef>
-          <a:fillRef idx="1">
-            <a:schemeClr val="accent1"/>
-          </a:fillRef>
-          <a:effectRef idx="0">
-            <a:schemeClr val="accent1"/>
-          </a:effectRef>
-          <a:fontRef idx="minor">
-            <a:schemeClr val="lt1"/>
-          </a:fontRef>
-        </p:style>
-        <p:txBody>
-          <a:bodyPr rtlCol="0" anchor="ctr"/>
-          <a:lstStyle/>
-          <a:p>
-            <a:pPr algn="ctr"/>
-            <a:endParaRPr lang="en-US"/>
-          </a:p>
-        </p:txBody>
-      </p:sp>
-    </p:spTree>
-    <p:extLst>
-      <p:ext uri="{BB962C8B-B14F-4D97-AF65-F5344CB8AC3E}">
-        <p14:creationId xmlns:p14="http://schemas.microsoft.com/office/powerpoint/2010/main" val="1039067511"/>
-      </p:ext>
-    </p:extLst>
-  </p:cSld>
-  <p:clrMapOvr>
-    <a:masterClrMapping/>
-  </p:clrMapOvr>
-</p:sld>
-</file>
-
-<file path=ppt/slides/slide2.xml><?xml version="1.0" encoding="utf-8"?>
-<p:sld xmlns:a="http://schemas.openxmlformats.org/drawingml/2006/main" xmlns:r="http://schemas.openxmlformats.org/officeDocument/2006/relationships" xmlns:p="http://schemas.openxmlformats.org/presentationml/2006/main">
-  <p:cSld>
-    <p:bg>
-      <p:bgPr>
-        <a:solidFill>
-          <a:schemeClr val="bg1"/>
-        </a:solidFill>
-        <a:effectLst/>
-      </p:bgPr>
-    </p:bg>
-    <p:spTree>
-      <p:nvGrpSpPr>
-        <p:cNvPr id="1" name=""/>
-        <p:cNvGrpSpPr/>
-        <p:nvPr/>
-      </p:nvGrpSpPr>
-      <p:grpSpPr>
-        <a:xfrm>
-          <a:off x="0" y="0"/>
-          <a:ext cx="0" cy="0"/>
-          <a:chOff x="0" y="0"/>
-          <a:chExt cx="0" cy="0"/>
-        </a:xfrm>
-      </p:grpSpPr>
-      <p:sp useBgFill="1">
-        <p:nvSpPr>
-          <p:cNvPr id="11" name="Rectangle 10">
-            <a:extLst>
-              <a:ext uri="{FF2B5EF4-FFF2-40B4-BE49-F238E27FC236}">
                 <a16:creationId xmlns:a16="http://schemas.microsoft.com/office/drawing/2014/main" id="{D009D6D5-DAC2-4A8B-A17A-E206B9012D09}"/>
               </a:ext>
               <a:ext uri="{C183D7F6-B498-43B3-948B-1728B52AA6E4}">
@@ -3883,29 +3595,15 @@
               <a:tabLst/>
             </a:pPr>
             <a:r>
-              <a:rPr kumimoji="0" lang="fr-MQ" altLang="fr-MQ" sz="2000" b="0" i="0" u="none" strike="noStrike" cap="none" normalizeH="0" baseline="0" dirty="0">
+              <a:rPr kumimoji="0" lang="fr-MQ" altLang="fr-MQ" sz="2000" b="0" i="0" u="none" strike="noStrike" cap="none" normalizeH="0" baseline="0">
                 <a:ln>
                   <a:noFill/>
                 </a:ln>
                 <a:effectLst/>
                 <a:latin typeface="Arial" panose="020B0604020202020204" pitchFamily="34" charset="0"/>
               </a:rPr>
-              <a:t>Détection de seuils critiques</a:t>
-            </a:r>
-          </a:p>
-          <a:p>
-            <a:pPr marL="0" marR="0" lvl="0" indent="0" defTabSz="914400" rtl="0" eaLnBrk="0" fontAlgn="base" latinLnBrk="0" hangingPunct="0">
-              <a:spcBef>
-                <a:spcPct val="0"/>
-              </a:spcBef>
-              <a:spcAft>
-                <a:spcPts val="600"/>
-              </a:spcAft>
-              <a:buClrTx/>
-              <a:buSzTx/>
-              <a:buNone/>
-              <a:tabLst/>
-            </a:pPr>
+              <a:t>Envoi d’alertes</a:t>
+            </a:r>
             <a:endParaRPr kumimoji="0" lang="fr-MQ" altLang="fr-MQ" sz="2000" b="0" i="0" u="none" strike="noStrike" cap="none" normalizeH="0" baseline="0" dirty="0">
               <a:ln>
                 <a:noFill/>
@@ -3913,31 +3611,6 @@
               <a:effectLst/>
               <a:latin typeface="Arial" panose="020B0604020202020204" pitchFamily="34" charset="0"/>
             </a:endParaRPr>
-          </a:p>
-          <a:p>
-            <a:pPr marL="0" marR="0" lvl="0" indent="0" defTabSz="914400" rtl="0" eaLnBrk="0" fontAlgn="base" latinLnBrk="0" hangingPunct="0">
-              <a:spcBef>
-                <a:spcPct val="0"/>
-              </a:spcBef>
-              <a:spcAft>
-                <a:spcPts val="600"/>
-              </a:spcAft>
-              <a:buClrTx/>
-              <a:buSzTx/>
-              <a:buFontTx/>
-              <a:buChar char="•"/>
-              <a:tabLst/>
-            </a:pPr>
-            <a:r>
-              <a:rPr kumimoji="0" lang="fr-MQ" altLang="fr-MQ" sz="2000" b="0" i="0" u="none" strike="noStrike" cap="none" normalizeH="0" baseline="0" dirty="0">
-                <a:ln>
-                  <a:noFill/>
-                </a:ln>
-                <a:effectLst/>
-                <a:latin typeface="Arial" panose="020B0604020202020204" pitchFamily="34" charset="0"/>
-              </a:rPr>
-              <a:t>Transmission des données</a:t>
-            </a:r>
           </a:p>
           <a:p>
             <a:pPr marL="0" marR="0" lvl="0" indent="0" defTabSz="914400" rtl="0" eaLnBrk="0" fontAlgn="base" latinLnBrk="0" hangingPunct="0">
@@ -4521,889 +4194,6 @@
     <p:extLst>
       <p:ext uri="{BB962C8B-B14F-4D97-AF65-F5344CB8AC3E}">
         <p14:creationId xmlns:p14="http://schemas.microsoft.com/office/powerpoint/2010/main" val="1661205740"/>
-      </p:ext>
-    </p:extLst>
-  </p:cSld>
-  <p:clrMapOvr>
-    <a:masterClrMapping/>
-  </p:clrMapOvr>
-</p:sld>
-</file>
-
-<file path=ppt/slides/slide3.xml><?xml version="1.0" encoding="utf-8"?>
-<p:sld xmlns:a="http://schemas.openxmlformats.org/drawingml/2006/main" xmlns:r="http://schemas.openxmlformats.org/officeDocument/2006/relationships" xmlns:p="http://schemas.openxmlformats.org/presentationml/2006/main">
-  <p:cSld>
-    <p:bg>
-      <p:bgPr>
-        <a:solidFill>
-          <a:schemeClr val="bg1"/>
-        </a:solidFill>
-        <a:effectLst/>
-      </p:bgPr>
-    </p:bg>
-    <p:spTree>
-      <p:nvGrpSpPr>
-        <p:cNvPr id="1" name=""/>
-        <p:cNvGrpSpPr/>
-        <p:nvPr/>
-      </p:nvGrpSpPr>
-      <p:grpSpPr>
-        <a:xfrm>
-          <a:off x="0" y="0"/>
-          <a:ext cx="0" cy="0"/>
-          <a:chOff x="0" y="0"/>
-          <a:chExt cx="0" cy="0"/>
-        </a:xfrm>
-      </p:grpSpPr>
-      <p:sp useBgFill="1">
-        <p:nvSpPr>
-          <p:cNvPr id="12" name="Rectangle 11">
-            <a:extLst>
-              <a:ext uri="{FF2B5EF4-FFF2-40B4-BE49-F238E27FC236}">
-                <a16:creationId xmlns:a16="http://schemas.microsoft.com/office/drawing/2014/main" id="{D009D6D5-DAC2-4A8B-A17A-E206B9012D09}"/>
-              </a:ext>
-              <a:ext uri="{C183D7F6-B498-43B3-948B-1728B52AA6E4}">
-                <adec:decorative xmlns:adec="http://schemas.microsoft.com/office/drawing/2017/decorative" val="1"/>
-              </a:ext>
-            </a:extLst>
-          </p:cNvPr>
-          <p:cNvSpPr>
-            <a:spLocks noGrp="1" noRot="1" noChangeAspect="1" noMove="1" noResize="1" noEditPoints="1" noAdjustHandles="1" noChangeArrowheads="1" noChangeShapeType="1" noTextEdit="1"/>
-          </p:cNvSpPr>
-          <p:nvPr>
-            <p:extLst>
-              <p:ext uri="{386F3935-93C4-4BCD-93E2-E3B085C9AB24}">
-                <p16:designElem xmlns:p16="http://schemas.microsoft.com/office/powerpoint/2015/main" val="1"/>
-              </p:ext>
-            </p:extLst>
-          </p:nvPr>
-        </p:nvSpPr>
-        <p:spPr>
-          <a:xfrm>
-            <a:off x="0" y="0"/>
-            <a:ext cx="12188952" cy="6858000"/>
-          </a:xfrm>
-          <a:prstGeom prst="rect">
-            <a:avLst/>
-          </a:prstGeom>
-          <a:ln>
-            <a:noFill/>
-          </a:ln>
-        </p:spPr>
-        <p:style>
-          <a:lnRef idx="2">
-            <a:schemeClr val="accent1">
-              <a:shade val="50000"/>
-            </a:schemeClr>
-          </a:lnRef>
-          <a:fillRef idx="1">
-            <a:schemeClr val="accent1"/>
-          </a:fillRef>
-          <a:effectRef idx="0">
-            <a:schemeClr val="accent1"/>
-          </a:effectRef>
-          <a:fontRef idx="minor">
-            <a:schemeClr val="lt1"/>
-          </a:fontRef>
-        </p:style>
-        <p:txBody>
-          <a:bodyPr rtlCol="0" anchor="ctr"/>
-          <a:lstStyle/>
-          <a:p>
-            <a:pPr algn="ctr"/>
-            <a:endParaRPr lang="en-US"/>
-          </a:p>
-        </p:txBody>
-      </p:sp>
-      <p:sp>
-        <p:nvSpPr>
-          <p:cNvPr id="2" name="Titre 1">
-            <a:extLst>
-              <a:ext uri="{FF2B5EF4-FFF2-40B4-BE49-F238E27FC236}">
-                <a16:creationId xmlns:a16="http://schemas.microsoft.com/office/drawing/2014/main" id="{363B1DFF-F83B-A949-1D30-C4199A0DFD64}"/>
-              </a:ext>
-            </a:extLst>
-          </p:cNvPr>
-          <p:cNvSpPr>
-            <a:spLocks noGrp="1"/>
-          </p:cNvSpPr>
-          <p:nvPr>
-            <p:ph type="title"/>
-          </p:nvPr>
-        </p:nvSpPr>
-        <p:spPr>
-          <a:xfrm>
-            <a:off x="0" y="0"/>
-            <a:ext cx="5251316" cy="1807305"/>
-          </a:xfrm>
-        </p:spPr>
-        <p:txBody>
-          <a:bodyPr>
-            <a:normAutofit/>
-          </a:bodyPr>
-          <a:lstStyle/>
-          <a:p>
-            <a:r>
-              <a:rPr lang="fr-FR" sz="3800" dirty="0"/>
-              <a:t>Ce que je ne dois pas faire </a:t>
-            </a:r>
-          </a:p>
-        </p:txBody>
-      </p:sp>
-      <p:pic>
-        <p:nvPicPr>
-          <p:cNvPr id="5" name="Espace réservé du contenu 4" descr="Une image contenant intérieur, table, ordinateur portable, vase&#10;&#10;Le contenu généré par l’IA peut être incorrect.">
-            <a:extLst>
-              <a:ext uri="{FF2B5EF4-FFF2-40B4-BE49-F238E27FC236}">
-                <a16:creationId xmlns:a16="http://schemas.microsoft.com/office/drawing/2014/main" id="{D91B5955-EEE7-37EC-CFB6-5B9E7D6B8B26}"/>
-              </a:ext>
-            </a:extLst>
-          </p:cNvPr>
-          <p:cNvPicPr>
-            <a:picLocks noChangeAspect="1"/>
-          </p:cNvPicPr>
-          <p:nvPr/>
-        </p:nvPicPr>
-        <p:blipFill>
-          <a:blip r:embed="rId2"/>
-          <a:srcRect l="28682" r="23281" b="1"/>
-          <a:stretch>
-            <a:fillRect/>
-          </a:stretch>
-        </p:blipFill>
-        <p:spPr>
-          <a:xfrm>
-            <a:off x="6229215" y="10"/>
-            <a:ext cx="5962785" cy="6857990"/>
-          </a:xfrm>
-          <a:custGeom>
-            <a:avLst/>
-            <a:gdLst/>
-            <a:ahLst/>
-            <a:cxnLst/>
-            <a:rect l="l" t="t" r="r" b="b"/>
-            <a:pathLst>
-              <a:path w="5962785" h="6858000">
-                <a:moveTo>
-                  <a:pt x="1044839" y="0"/>
-                </a:moveTo>
-                <a:lnTo>
-                  <a:pt x="5962785" y="0"/>
-                </a:lnTo>
-                <a:lnTo>
-                  <a:pt x="5962785" y="6858000"/>
-                </a:lnTo>
-                <a:lnTo>
-                  <a:pt x="1469886" y="6858000"/>
-                </a:lnTo>
-                <a:lnTo>
-                  <a:pt x="1416006" y="6823984"/>
-                </a:lnTo>
-                <a:cubicBezTo>
-                  <a:pt x="1356767" y="6787940"/>
-                  <a:pt x="1296437" y="6755500"/>
-                  <a:pt x="1232473" y="6733873"/>
-                </a:cubicBezTo>
-                <a:cubicBezTo>
-                  <a:pt x="1145250" y="6705037"/>
-                  <a:pt x="1060933" y="6654575"/>
-                  <a:pt x="1075471" y="6503186"/>
-                </a:cubicBezTo>
-                <a:cubicBezTo>
-                  <a:pt x="1078378" y="6459932"/>
-                  <a:pt x="1055118" y="6427493"/>
-                  <a:pt x="1020229" y="6438306"/>
-                </a:cubicBezTo>
-                <a:cubicBezTo>
-                  <a:pt x="953358" y="6459932"/>
-                  <a:pt x="921375" y="6398656"/>
-                  <a:pt x="883579" y="6351798"/>
-                </a:cubicBezTo>
-                <a:cubicBezTo>
-                  <a:pt x="816707" y="6268895"/>
-                  <a:pt x="752743" y="6182387"/>
-                  <a:pt x="645167" y="6167969"/>
-                </a:cubicBezTo>
-                <a:cubicBezTo>
-                  <a:pt x="665519" y="6103088"/>
-                  <a:pt x="700408" y="6110298"/>
-                  <a:pt x="732391" y="6124716"/>
-                </a:cubicBezTo>
-                <a:cubicBezTo>
-                  <a:pt x="816707" y="6160761"/>
-                  <a:pt x="901023" y="6200410"/>
-                  <a:pt x="985339" y="6236455"/>
-                </a:cubicBezTo>
-                <a:cubicBezTo>
-                  <a:pt x="1040581" y="6258081"/>
-                  <a:pt x="1095822" y="6290522"/>
-                  <a:pt x="1168509" y="6265291"/>
-                </a:cubicBezTo>
-                <a:cubicBezTo>
-                  <a:pt x="1104545" y="6135530"/>
-                  <a:pt x="996969" y="6110298"/>
-                  <a:pt x="909746" y="6070649"/>
-                </a:cubicBezTo>
-                <a:cubicBezTo>
-                  <a:pt x="802169" y="6020185"/>
-                  <a:pt x="738206" y="5926470"/>
-                  <a:pt x="659704" y="5818335"/>
-                </a:cubicBezTo>
-                <a:cubicBezTo>
-                  <a:pt x="738206" y="5789500"/>
-                  <a:pt x="787632" y="5868798"/>
-                  <a:pt x="851597" y="5865193"/>
-                </a:cubicBezTo>
-                <a:cubicBezTo>
-                  <a:pt x="854504" y="5854380"/>
-                  <a:pt x="860319" y="5832753"/>
-                  <a:pt x="860319" y="5832753"/>
-                </a:cubicBezTo>
-                <a:cubicBezTo>
-                  <a:pt x="755650" y="5775081"/>
-                  <a:pt x="709132" y="5666947"/>
-                  <a:pt x="691686" y="5533581"/>
-                </a:cubicBezTo>
-                <a:cubicBezTo>
-                  <a:pt x="685872" y="5465095"/>
-                  <a:pt x="648075" y="5443468"/>
-                  <a:pt x="610278" y="5411029"/>
-                </a:cubicBezTo>
-                <a:cubicBezTo>
-                  <a:pt x="482350" y="5299289"/>
-                  <a:pt x="345700" y="5198364"/>
-                  <a:pt x="238123" y="5046976"/>
-                </a:cubicBezTo>
-                <a:cubicBezTo>
-                  <a:pt x="363144" y="5064998"/>
-                  <a:pt x="461997" y="5165924"/>
-                  <a:pt x="592833" y="5209177"/>
-                </a:cubicBezTo>
-                <a:cubicBezTo>
-                  <a:pt x="488165" y="5043371"/>
-                  <a:pt x="351514" y="4956864"/>
-                  <a:pt x="226494" y="4855939"/>
-                </a:cubicBezTo>
-                <a:cubicBezTo>
-                  <a:pt x="168344" y="4809081"/>
-                  <a:pt x="116011" y="4751408"/>
-                  <a:pt x="49139" y="4726177"/>
-                </a:cubicBezTo>
-                <a:cubicBezTo>
-                  <a:pt x="25879" y="4718968"/>
-                  <a:pt x="-14825" y="4700947"/>
-                  <a:pt x="5527" y="4650483"/>
-                </a:cubicBezTo>
-                <a:cubicBezTo>
-                  <a:pt x="22972" y="4607230"/>
-                  <a:pt x="54954" y="4621648"/>
-                  <a:pt x="84029" y="4632460"/>
-                </a:cubicBezTo>
-                <a:cubicBezTo>
-                  <a:pt x="153807" y="4661296"/>
-                  <a:pt x="229401" y="4661296"/>
-                  <a:pt x="325347" y="4661296"/>
-                </a:cubicBezTo>
-                <a:cubicBezTo>
-                  <a:pt x="243939" y="4524326"/>
-                  <a:pt x="95658" y="4567580"/>
-                  <a:pt x="25879" y="4423401"/>
-                </a:cubicBezTo>
-                <a:cubicBezTo>
-                  <a:pt x="113103" y="4398170"/>
-                  <a:pt x="179975" y="4448632"/>
-                  <a:pt x="249753" y="4459446"/>
-                </a:cubicBezTo>
-                <a:cubicBezTo>
-                  <a:pt x="313718" y="4470259"/>
-                  <a:pt x="328254" y="4445028"/>
-                  <a:pt x="313718" y="4365729"/>
-                </a:cubicBezTo>
-                <a:cubicBezTo>
-                  <a:pt x="290458" y="4243177"/>
-                  <a:pt x="325347" y="4181900"/>
-                  <a:pt x="418386" y="4214341"/>
-                </a:cubicBezTo>
-                <a:cubicBezTo>
-                  <a:pt x="505609" y="4246781"/>
-                  <a:pt x="514332" y="4199922"/>
-                  <a:pt x="491072" y="4131438"/>
-                </a:cubicBezTo>
-                <a:cubicBezTo>
-                  <a:pt x="456183" y="4030512"/>
-                  <a:pt x="493979" y="3951214"/>
-                  <a:pt x="520147" y="3864706"/>
-                </a:cubicBezTo>
-                <a:cubicBezTo>
-                  <a:pt x="560851" y="3734945"/>
-                  <a:pt x="543407" y="3670064"/>
-                  <a:pt x="459090" y="3572743"/>
-                </a:cubicBezTo>
-                <a:cubicBezTo>
-                  <a:pt x="409664" y="3518676"/>
-                  <a:pt x="360236" y="3471818"/>
-                  <a:pt x="290458" y="3424959"/>
-                </a:cubicBezTo>
-                <a:cubicBezTo>
-                  <a:pt x="450368" y="3399728"/>
-                  <a:pt x="284643" y="3313221"/>
-                  <a:pt x="339884" y="3259153"/>
-                </a:cubicBezTo>
-                <a:cubicBezTo>
-                  <a:pt x="453275" y="3237527"/>
-                  <a:pt x="543407" y="3410542"/>
-                  <a:pt x="697501" y="3360078"/>
-                </a:cubicBezTo>
-                <a:cubicBezTo>
-                  <a:pt x="511425" y="3212294"/>
-                  <a:pt x="302087" y="3165436"/>
-                  <a:pt x="165437" y="2967190"/>
-                </a:cubicBezTo>
-                <a:cubicBezTo>
-                  <a:pt x="197419" y="2923937"/>
-                  <a:pt x="229401" y="2967190"/>
-                  <a:pt x="255568" y="2949167"/>
-                </a:cubicBezTo>
-                <a:cubicBezTo>
-                  <a:pt x="255568" y="2938354"/>
-                  <a:pt x="560851" y="3006840"/>
-                  <a:pt x="578296" y="2725691"/>
-                </a:cubicBezTo>
-                <a:cubicBezTo>
-                  <a:pt x="584111" y="2725691"/>
-                  <a:pt x="589926" y="2725691"/>
-                  <a:pt x="595740" y="2714876"/>
-                </a:cubicBezTo>
-                <a:cubicBezTo>
-                  <a:pt x="627722" y="2675228"/>
-                  <a:pt x="598648" y="2581510"/>
-                  <a:pt x="650982" y="2574301"/>
-                </a:cubicBezTo>
-                <a:cubicBezTo>
-                  <a:pt x="709132" y="2567092"/>
-                  <a:pt x="764373" y="2534653"/>
-                  <a:pt x="825429" y="2552674"/>
-                </a:cubicBezTo>
-                <a:cubicBezTo>
-                  <a:pt x="871949" y="2567092"/>
-                  <a:pt x="921375" y="2585115"/>
-                  <a:pt x="970802" y="2585115"/>
-                </a:cubicBezTo>
-                <a:cubicBezTo>
-                  <a:pt x="1023136" y="2585115"/>
-                  <a:pt x="1095822" y="2707668"/>
-                  <a:pt x="1127805" y="2545465"/>
-                </a:cubicBezTo>
-                <a:cubicBezTo>
-                  <a:pt x="1127805" y="2538257"/>
-                  <a:pt x="1217936" y="2556280"/>
-                  <a:pt x="1267362" y="2563488"/>
-                </a:cubicBezTo>
-                <a:cubicBezTo>
-                  <a:pt x="1308067" y="2570698"/>
-                  <a:pt x="1357494" y="2603137"/>
-                  <a:pt x="1386568" y="2538257"/>
-                </a:cubicBezTo>
-                <a:cubicBezTo>
-                  <a:pt x="1401105" y="2498607"/>
-                  <a:pt x="1331326" y="2426518"/>
-                  <a:pt x="1270270" y="2419309"/>
-                </a:cubicBezTo>
-                <a:cubicBezTo>
-                  <a:pt x="1215029" y="2412101"/>
-                  <a:pt x="1159787" y="2404892"/>
-                  <a:pt x="1107453" y="2419309"/>
-                </a:cubicBezTo>
-                <a:cubicBezTo>
-                  <a:pt x="1043489" y="2437331"/>
-                  <a:pt x="1008599" y="2408495"/>
-                  <a:pt x="991154" y="2343615"/>
-                </a:cubicBezTo>
-                <a:cubicBezTo>
-                  <a:pt x="970802" y="2275131"/>
-                  <a:pt x="933005" y="2239085"/>
-                  <a:pt x="880671" y="2206645"/>
-                </a:cubicBezTo>
-                <a:cubicBezTo>
-                  <a:pt x="752743" y="2127346"/>
-                  <a:pt x="630630" y="2033629"/>
-                  <a:pt x="491072" y="1986771"/>
-                </a:cubicBezTo>
-                <a:cubicBezTo>
-                  <a:pt x="464905" y="1979562"/>
-                  <a:pt x="432923" y="1965145"/>
-                  <a:pt x="421293" y="1903868"/>
-                </a:cubicBezTo>
-                <a:cubicBezTo>
-                  <a:pt x="799262" y="1997584"/>
-                  <a:pt x="1142342" y="2239085"/>
-                  <a:pt x="1531941" y="2224667"/>
-                </a:cubicBezTo>
-                <a:cubicBezTo>
-                  <a:pt x="1427272" y="2148974"/>
-                  <a:pt x="1302252" y="2145369"/>
-                  <a:pt x="1188861" y="2091301"/>
-                </a:cubicBezTo>
-                <a:cubicBezTo>
-                  <a:pt x="1270270" y="2051652"/>
-                  <a:pt x="1345864" y="2094906"/>
-                  <a:pt x="1421458" y="2116532"/>
-                </a:cubicBezTo>
-                <a:cubicBezTo>
-                  <a:pt x="1485422" y="2134554"/>
-                  <a:pt x="1543571" y="2138160"/>
-                  <a:pt x="1549386" y="2026420"/>
-                </a:cubicBezTo>
-                <a:cubicBezTo>
-                  <a:pt x="1549386" y="2015607"/>
-                  <a:pt x="1549386" y="2008398"/>
-                  <a:pt x="1549386" y="1997584"/>
-                </a:cubicBezTo>
-                <a:cubicBezTo>
-                  <a:pt x="1526126" y="1950727"/>
-                  <a:pt x="1494144" y="1929099"/>
-                  <a:pt x="1453440" y="1914682"/>
-                </a:cubicBezTo>
-                <a:cubicBezTo>
-                  <a:pt x="1430180" y="1907473"/>
-                  <a:pt x="1398198" y="1893056"/>
-                  <a:pt x="1398198" y="1860614"/>
-                </a:cubicBezTo>
-                <a:cubicBezTo>
-                  <a:pt x="1401105" y="1738063"/>
-                  <a:pt x="1322604" y="1702018"/>
-                  <a:pt x="1247011" y="1665972"/>
-                </a:cubicBezTo>
-                <a:cubicBezTo>
-                  <a:pt x="1287715" y="1604696"/>
-                  <a:pt x="1322604" y="1647950"/>
-                  <a:pt x="1354586" y="1644345"/>
-                </a:cubicBezTo>
-                <a:cubicBezTo>
-                  <a:pt x="1374939" y="1640741"/>
-                  <a:pt x="1395290" y="1637138"/>
-                  <a:pt x="1395290" y="1604696"/>
-                </a:cubicBezTo>
-                <a:cubicBezTo>
-                  <a:pt x="1395290" y="1579465"/>
-                  <a:pt x="1386568" y="1547025"/>
-                  <a:pt x="1366216" y="1547025"/>
-                </a:cubicBezTo>
-                <a:cubicBezTo>
-                  <a:pt x="1238288" y="1543420"/>
-                  <a:pt x="1165601" y="1370405"/>
-                  <a:pt x="1031858" y="1370405"/>
-                </a:cubicBezTo>
-                <a:cubicBezTo>
-                  <a:pt x="950450" y="1370405"/>
-                  <a:pt x="1072563" y="1273083"/>
-                  <a:pt x="1005692" y="1233435"/>
-                </a:cubicBezTo>
-                <a:cubicBezTo>
-                  <a:pt x="991154" y="1222621"/>
-                  <a:pt x="1046396" y="1208203"/>
-                  <a:pt x="1069655" y="1211808"/>
-                </a:cubicBezTo>
-                <a:cubicBezTo>
-                  <a:pt x="1092915" y="1215412"/>
-                  <a:pt x="1113268" y="1240644"/>
-                  <a:pt x="1142342" y="1222621"/>
-                </a:cubicBezTo>
-                <a:cubicBezTo>
-                  <a:pt x="1156879" y="1157741"/>
-                  <a:pt x="1119082" y="1132510"/>
-                  <a:pt x="1084193" y="1114487"/>
-                </a:cubicBezTo>
-                <a:cubicBezTo>
-                  <a:pt x="1008599" y="1071234"/>
-                  <a:pt x="933005" y="1020771"/>
-                  <a:pt x="848689" y="1006353"/>
-                </a:cubicBezTo>
-                <a:cubicBezTo>
-                  <a:pt x="819615" y="1002748"/>
-                  <a:pt x="802169" y="984726"/>
-                  <a:pt x="805077" y="948681"/>
-                </a:cubicBezTo>
-                <a:cubicBezTo>
-                  <a:pt x="810892" y="901822"/>
-                  <a:pt x="839967" y="916240"/>
-                  <a:pt x="863226" y="919844"/>
-                </a:cubicBezTo>
-                <a:cubicBezTo>
-                  <a:pt x="877764" y="923450"/>
-                  <a:pt x="892301" y="934263"/>
-                  <a:pt x="906838" y="909031"/>
-                </a:cubicBezTo>
-                <a:cubicBezTo>
-                  <a:pt x="566666" y="653113"/>
-                  <a:pt x="386404" y="667532"/>
-                  <a:pt x="5527" y="458471"/>
-                </a:cubicBezTo>
-                <a:cubicBezTo>
-                  <a:pt x="89843" y="418822"/>
-                  <a:pt x="150900" y="447658"/>
-                  <a:pt x="209049" y="454867"/>
-                </a:cubicBezTo>
-                <a:cubicBezTo>
-                  <a:pt x="354422" y="472890"/>
-                  <a:pt x="264290" y="505329"/>
-                  <a:pt x="409664" y="526956"/>
-                </a:cubicBezTo>
-                <a:cubicBezTo>
-                  <a:pt x="479443" y="537770"/>
-                  <a:pt x="543407" y="573815"/>
-                  <a:pt x="621908" y="516143"/>
-                </a:cubicBezTo>
-                <a:cubicBezTo>
-                  <a:pt x="674242" y="476494"/>
-                  <a:pt x="758558" y="519747"/>
-                  <a:pt x="822522" y="552188"/>
-                </a:cubicBezTo>
-                <a:cubicBezTo>
-                  <a:pt x="874856" y="581024"/>
-                  <a:pt x="927190" y="588232"/>
-                  <a:pt x="996969" y="552188"/>
-                </a:cubicBezTo>
-                <a:cubicBezTo>
-                  <a:pt x="933005" y="530562"/>
-                  <a:pt x="883579" y="512539"/>
-                  <a:pt x="834151" y="498120"/>
-                </a:cubicBezTo>
-                <a:cubicBezTo>
-                  <a:pt x="793447" y="487307"/>
-                  <a:pt x="770187" y="462076"/>
-                  <a:pt x="773095" y="408008"/>
-                </a:cubicBezTo>
-                <a:cubicBezTo>
-                  <a:pt x="773095" y="379172"/>
-                  <a:pt x="764373" y="339523"/>
-                  <a:pt x="793447" y="325106"/>
-                </a:cubicBezTo>
-                <a:cubicBezTo>
-                  <a:pt x="816707" y="310688"/>
-                  <a:pt x="848689" y="325106"/>
-                  <a:pt x="860319" y="350336"/>
-                </a:cubicBezTo>
-                <a:cubicBezTo>
-                  <a:pt x="874856" y="397195"/>
-                  <a:pt x="889393" y="440449"/>
-                  <a:pt x="938820" y="444054"/>
-                </a:cubicBezTo>
-                <a:cubicBezTo>
-                  <a:pt x="1005692" y="451262"/>
-                  <a:pt x="967894" y="422426"/>
-                  <a:pt x="956265" y="386381"/>
-                </a:cubicBezTo>
-                <a:cubicBezTo>
-                  <a:pt x="944635" y="346733"/>
-                  <a:pt x="979525" y="335919"/>
-                  <a:pt x="1002784" y="343127"/>
-                </a:cubicBezTo>
-                <a:cubicBezTo>
-                  <a:pt x="1090008" y="375569"/>
-                  <a:pt x="1180139" y="317897"/>
-                  <a:pt x="1270270" y="364755"/>
-                </a:cubicBezTo>
-                <a:cubicBezTo>
-                  <a:pt x="1247011" y="249411"/>
-                  <a:pt x="1197583" y="198949"/>
-                  <a:pt x="1092915" y="180926"/>
-                </a:cubicBezTo>
-                <a:cubicBezTo>
-                  <a:pt x="1055118" y="177322"/>
-                  <a:pt x="1014414" y="184530"/>
-                  <a:pt x="979525" y="152090"/>
-                </a:cubicBezTo>
-                <a:cubicBezTo>
-                  <a:pt x="959172" y="134068"/>
-                  <a:pt x="938820" y="112441"/>
-                  <a:pt x="953358" y="76396"/>
-                </a:cubicBezTo>
-                <a:cubicBezTo>
-                  <a:pt x="962080" y="51165"/>
-                  <a:pt x="985339" y="51165"/>
-                  <a:pt x="1005692" y="58373"/>
-                </a:cubicBezTo>
-                <a:cubicBezTo>
-                  <a:pt x="1090008" y="98023"/>
-                  <a:pt x="1180139" y="108837"/>
-                  <a:pt x="1267362" y="123254"/>
-                </a:cubicBezTo>
-                <a:cubicBezTo>
-                  <a:pt x="1281900" y="126859"/>
-                  <a:pt x="1296437" y="134068"/>
-                  <a:pt x="1310975" y="98023"/>
-                </a:cubicBezTo>
-                <a:cubicBezTo>
-                  <a:pt x="1260095" y="81803"/>
-                  <a:pt x="1209941" y="62879"/>
-                  <a:pt x="1159787" y="43505"/>
-                </a:cubicBezTo>
-                <a:close/>
-              </a:path>
-            </a:pathLst>
-          </a:custGeom>
-        </p:spPr>
-      </p:pic>
-      <p:sp>
-        <p:nvSpPr>
-          <p:cNvPr id="6" name="Rectangle 1">
-            <a:extLst>
-              <a:ext uri="{FF2B5EF4-FFF2-40B4-BE49-F238E27FC236}">
-                <a16:creationId xmlns:a16="http://schemas.microsoft.com/office/drawing/2014/main" id="{FAE039BE-9660-A148-A101-2704B1213748}"/>
-              </a:ext>
-            </a:extLst>
-          </p:cNvPr>
-          <p:cNvSpPr>
-            <a:spLocks noGrp="1" noChangeArrowheads="1"/>
-          </p:cNvSpPr>
-          <p:nvPr>
-            <p:ph idx="1"/>
-          </p:nvPr>
-        </p:nvSpPr>
-        <p:spPr bwMode="auto">
-          <a:xfrm>
-            <a:off x="419372" y="2438802"/>
-            <a:ext cx="4672914" cy="2246769"/>
-          </a:xfrm>
-          <a:prstGeom prst="rect">
-            <a:avLst/>
-          </a:prstGeom>
-          <a:noFill/>
-          <a:ln>
-            <a:noFill/>
-          </a:ln>
-          <a:effectLst/>
-          <a:extLst>
-            <a:ext uri="{909E8E84-426E-40DD-AFC4-6F175D3DCCD1}">
-              <a14:hiddenFill xmlns:a14="http://schemas.microsoft.com/office/drawing/2010/main">
-                <a:solidFill>
-                  <a:schemeClr val="accent1"/>
-                </a:solidFill>
-              </a14:hiddenFill>
-            </a:ext>
-            <a:ext uri="{91240B29-F687-4F45-9708-019B960494DF}">
-              <a14:hiddenLine xmlns:a14="http://schemas.microsoft.com/office/drawing/2010/main" w="9525">
-                <a:solidFill>
-                  <a:schemeClr val="tx1"/>
-                </a:solidFill>
-                <a:miter lim="800000"/>
-                <a:headEnd/>
-                <a:tailEnd/>
-              </a14:hiddenLine>
-            </a:ext>
-            <a:ext uri="{AF507438-7753-43E0-B8FC-AC1667EBCBE1}">
-              <a14:hiddenEffects xmlns:a14="http://schemas.microsoft.com/office/drawing/2010/main">
-                <a:effectLst>
-                  <a:outerShdw dist="35921" dir="2700000" algn="ctr" rotWithShape="0">
-                    <a:schemeClr val="bg2"/>
-                  </a:outerShdw>
-                </a:effectLst>
-              </a14:hiddenEffects>
-            </a:ext>
-          </a:extLst>
-        </p:spPr>
-        <p:txBody>
-          <a:bodyPr vert="horz" wrap="square" lIns="91440" tIns="45720" rIns="91440" bIns="45720" numCol="1" anchor="ctr" anchorCtr="0" compatLnSpc="1">
-            <a:prstTxWarp prst="textNoShape">
-              <a:avLst/>
-            </a:prstTxWarp>
-            <a:spAutoFit/>
-          </a:bodyPr>
-          <a:lstStyle/>
-          <a:p>
-            <a:pPr eaLnBrk="0" fontAlgn="base" hangingPunct="0">
-              <a:lnSpc>
-                <a:spcPct val="100000"/>
-              </a:lnSpc>
-              <a:spcBef>
-                <a:spcPct val="0"/>
-              </a:spcBef>
-              <a:spcAft>
-                <a:spcPct val="0"/>
-              </a:spcAft>
-            </a:pPr>
-            <a:r>
-              <a:rPr kumimoji="0" lang="fr-MQ" altLang="fr-MQ" sz="2000" b="0" i="0" u="none" strike="noStrike" cap="none" normalizeH="0" baseline="0" dirty="0">
-                <a:ln>
-                  <a:noFill/>
-                </a:ln>
-                <a:solidFill>
-                  <a:schemeClr val="tx1"/>
-                </a:solidFill>
-                <a:effectLst/>
-                <a:latin typeface="Arial" panose="020B0604020202020204" pitchFamily="34" charset="0"/>
-              </a:rPr>
-              <a:t>Mesure de masse</a:t>
-            </a:r>
-          </a:p>
-          <a:p>
-            <a:pPr marL="0" marR="0" lvl="0" indent="0" algn="l" defTabSz="914400" rtl="0" eaLnBrk="0" fontAlgn="base" latinLnBrk="0" hangingPunct="0">
-              <a:lnSpc>
-                <a:spcPct val="100000"/>
-              </a:lnSpc>
-              <a:spcBef>
-                <a:spcPct val="0"/>
-              </a:spcBef>
-              <a:spcAft>
-                <a:spcPct val="0"/>
-              </a:spcAft>
-              <a:buClrTx/>
-              <a:buSzTx/>
-              <a:buNone/>
-              <a:tabLst/>
-            </a:pPr>
-            <a:endParaRPr kumimoji="0" lang="fr-MQ" altLang="fr-MQ" sz="2000" b="0" i="0" u="none" strike="noStrike" cap="none" normalizeH="0" baseline="0" dirty="0">
-              <a:ln>
-                <a:noFill/>
-              </a:ln>
-              <a:solidFill>
-                <a:schemeClr val="tx1"/>
-              </a:solidFill>
-              <a:effectLst/>
-              <a:latin typeface="Arial" panose="020B0604020202020204" pitchFamily="34" charset="0"/>
-            </a:endParaRPr>
-          </a:p>
-          <a:p>
-            <a:pPr eaLnBrk="0" fontAlgn="base" hangingPunct="0">
-              <a:lnSpc>
-                <a:spcPct val="100000"/>
-              </a:lnSpc>
-              <a:spcBef>
-                <a:spcPct val="0"/>
-              </a:spcBef>
-              <a:spcAft>
-                <a:spcPct val="0"/>
-              </a:spcAft>
-            </a:pPr>
-            <a:r>
-              <a:rPr kumimoji="0" lang="fr-MQ" altLang="fr-MQ" sz="2000" b="0" i="0" u="none" strike="noStrike" cap="none" normalizeH="0" baseline="0" dirty="0">
-                <a:ln>
-                  <a:noFill/>
-                </a:ln>
-                <a:solidFill>
-                  <a:schemeClr val="tx1"/>
-                </a:solidFill>
-                <a:effectLst/>
-                <a:latin typeface="Arial" panose="020B0604020202020204" pitchFamily="34" charset="0"/>
-              </a:rPr>
-              <a:t>Interface web</a:t>
-            </a:r>
-          </a:p>
-          <a:p>
-            <a:pPr marL="0" marR="0" lvl="0" indent="0" algn="l" defTabSz="914400" rtl="0" eaLnBrk="0" fontAlgn="base" latinLnBrk="0" hangingPunct="0">
-              <a:lnSpc>
-                <a:spcPct val="100000"/>
-              </a:lnSpc>
-              <a:spcBef>
-                <a:spcPct val="0"/>
-              </a:spcBef>
-              <a:spcAft>
-                <a:spcPct val="0"/>
-              </a:spcAft>
-              <a:buClrTx/>
-              <a:buSzTx/>
-              <a:buFontTx/>
-              <a:buChar char="•"/>
-              <a:tabLst/>
-            </a:pPr>
-            <a:endParaRPr kumimoji="0" lang="fr-MQ" altLang="fr-MQ" sz="2000" b="0" i="0" u="none" strike="noStrike" cap="none" normalizeH="0" baseline="0" dirty="0">
-              <a:ln>
-                <a:noFill/>
-              </a:ln>
-              <a:solidFill>
-                <a:schemeClr val="tx1"/>
-              </a:solidFill>
-              <a:effectLst/>
-              <a:latin typeface="Arial" panose="020B0604020202020204" pitchFamily="34" charset="0"/>
-            </a:endParaRPr>
-          </a:p>
-          <a:p>
-            <a:pPr eaLnBrk="0" fontAlgn="base" hangingPunct="0">
-              <a:lnSpc>
-                <a:spcPct val="100000"/>
-              </a:lnSpc>
-              <a:spcBef>
-                <a:spcPct val="0"/>
-              </a:spcBef>
-              <a:spcAft>
-                <a:spcPct val="0"/>
-              </a:spcAft>
-            </a:pPr>
-            <a:r>
-              <a:rPr kumimoji="0" lang="fr-MQ" altLang="fr-MQ" sz="2000" b="0" i="0" u="none" strike="noStrike" cap="none" normalizeH="0" baseline="0" dirty="0">
-                <a:ln>
-                  <a:noFill/>
-                </a:ln>
-                <a:solidFill>
-                  <a:schemeClr val="tx1"/>
-                </a:solidFill>
-                <a:effectLst/>
-                <a:latin typeface="Arial" panose="020B0604020202020204" pitchFamily="34" charset="0"/>
-              </a:rPr>
-              <a:t>Base de données</a:t>
-            </a:r>
-          </a:p>
-          <a:p>
-            <a:pPr marL="0" marR="0" lvl="0" indent="0" algn="l" defTabSz="914400" rtl="0" eaLnBrk="0" fontAlgn="base" latinLnBrk="0" hangingPunct="0">
-              <a:lnSpc>
-                <a:spcPct val="100000"/>
-              </a:lnSpc>
-              <a:spcBef>
-                <a:spcPct val="0"/>
-              </a:spcBef>
-              <a:spcAft>
-                <a:spcPct val="0"/>
-              </a:spcAft>
-              <a:buClrTx/>
-              <a:buSzTx/>
-              <a:buFontTx/>
-              <a:buChar char="•"/>
-              <a:tabLst/>
-            </a:pPr>
-            <a:endParaRPr kumimoji="0" lang="fr-MQ" altLang="fr-MQ" sz="2000" b="0" i="0" u="none" strike="noStrike" cap="none" normalizeH="0" baseline="0" dirty="0">
-              <a:ln>
-                <a:noFill/>
-              </a:ln>
-              <a:solidFill>
-                <a:schemeClr val="tx1"/>
-              </a:solidFill>
-              <a:effectLst/>
-              <a:latin typeface="Arial" panose="020B0604020202020204" pitchFamily="34" charset="0"/>
-            </a:endParaRPr>
-          </a:p>
-          <a:p>
-            <a:pPr eaLnBrk="0" fontAlgn="base" hangingPunct="0">
-              <a:lnSpc>
-                <a:spcPct val="100000"/>
-              </a:lnSpc>
-              <a:spcBef>
-                <a:spcPct val="0"/>
-              </a:spcBef>
-              <a:spcAft>
-                <a:spcPct val="0"/>
-              </a:spcAft>
-            </a:pPr>
-            <a:r>
-              <a:rPr kumimoji="0" lang="fr-MQ" altLang="fr-MQ" sz="2000" b="0" i="0" u="none" strike="noStrike" cap="none" normalizeH="0" baseline="0" dirty="0">
-                <a:ln>
-                  <a:noFill/>
-                </a:ln>
-                <a:solidFill>
-                  <a:schemeClr val="tx1"/>
-                </a:solidFill>
-                <a:effectLst/>
-                <a:latin typeface="Arial" panose="020B0604020202020204" pitchFamily="34" charset="0"/>
-              </a:rPr>
-              <a:t>Gestion serveur</a:t>
-            </a:r>
-          </a:p>
-        </p:txBody>
-      </p:sp>
-    </p:spTree>
-    <p:extLst>
-      <p:ext uri="{BB962C8B-B14F-4D97-AF65-F5344CB8AC3E}">
-        <p14:creationId xmlns:p14="http://schemas.microsoft.com/office/powerpoint/2010/main" val="2102953781"/>
       </p:ext>
     </p:extLst>
   </p:cSld>
